--- a/ppt/out/WLC2급_제02강_초고령사회와죽음교육의필요성.pptx
+++ b/ppt/out/WLC2급_제02강_초고령사회와죽음교육의필요성.pptx
@@ -161,7 +161,7 @@
   <p:extLst>
     <p:ext uri="{521415D9-36F7-43E2-AB2F-B90AF26B5E84}">
       <p14:sectionLst xmlns:p14="http://schemas.microsoft.com/office/powerpoint/2010/main">
-        <p14:section name="열기" id="{a3585425-8d5a-bd93-4a15-b64daef5d8c1}">
+        <p14:section name="열기" id="{62e9e096-7b92-7099-59b6-4af42b694c00}">
           <p14:sldIdLst>
             <p14:sldId id="256"/>
             <p14:sldId id="257"/>
@@ -174,7 +174,7 @@
             <p14:sldId id="264"/>
           </p14:sldIdLst>
         </p14:section>
-        <p14:section name="1교시 죽음교육이 필요한 사회" id="{f5cf7325-40c4-5f33-aa53-9c60c4644bc2}">
+        <p14:section name="1교시 죽음교육이 필요한 사회" id="{c19ef6b8-2d10-5ddc-4913-01416fe7098d}">
           <p14:sldIdLst>
             <p14:sldId id="265"/>
             <p14:sldId id="266"/>
@@ -189,7 +189,7 @@
             <p14:sldId id="275"/>
           </p14:sldIdLst>
         </p14:section>
-        <p14:section name="2교시 대상과 현장" id="{c6fd1f03-b602-e3a6-fd66-3bca575a82b2}">
+        <p14:section name="2교시 대상과 현장" id="{0e974a05-5719-d190-f576-708bd79ddddb}">
           <p14:sldIdLst>
             <p14:sldId id="276"/>
             <p14:sldId id="277"/>
@@ -207,7 +207,7 @@
             <p14:sldId id="289"/>
           </p14:sldIdLst>
         </p14:section>
-        <p14:section name="3교시 죽음교육을 설계하다" id="{bb488641-c98c-9870-b519-863edaf5908a}">
+        <p14:section name="3교시 죽음교육을 설계하다" id="{bfebe4a3-9b4c-c3e4-4b63-9395d63ba24b}">
           <p14:sldIdLst>
             <p14:sldId id="290"/>
             <p14:sldId id="291"/>
@@ -226,7 +226,7 @@
             <p14:sldId id="304"/>
           </p14:sldIdLst>
         </p14:section>
-        <p14:section name="정리와 예고" id="{3b44e1be-4a0f-0e07-db11-07eef65797d1}">
+        <p14:section name="정리와 예고" id="{b58f3c7c-476c-cab7-0a1c-d95a66ca6404}">
           <p14:sldIdLst>
             <p14:sldId id="305"/>
             <p14:sldId id="306"/>
@@ -28032,7 +28032,7 @@
               <a:buNone/>
             </a:pPr>
             <a:r>
-              <a:rPr lang="en-US" sz="2100" b="1" dirty="0">
+              <a:rPr lang="en-US" sz="1700" b="1" dirty="0">
                 <a:solidFill>
                   <a:srgbClr val="1F4E4A"/>
                 </a:solidFill>
@@ -28043,14 +28043,14 @@
               <a:buNone/>
             </a:pPr>
             <a:r>
-              <a:rPr lang="en-US" sz="2100" dirty="0">
+              <a:rPr lang="en-US" sz="1700" dirty="0">
                 <a:solidFill>
                   <a:srgbClr val="222222"/>
                 </a:solidFill>
               </a:rPr>
               <a:t> 목적은 삶의 가치·관계·선택을 분명히 하는 것</a:t>
             </a:r>
-            <a:endParaRPr lang="en-US" sz="2100" dirty="0"/>
+            <a:endParaRPr lang="en-US" sz="1700" dirty="0"/>
           </a:p>
         </p:txBody>
       </p:sp>
@@ -28140,7 +28140,7 @@
               <a:buNone/>
             </a:pPr>
             <a:r>
-              <a:rPr lang="en-US" sz="2200" b="1" dirty="0">
+              <a:rPr lang="en-US" sz="1700" b="1" dirty="0">
                 <a:solidFill>
                   <a:srgbClr val="1F4E4A"/>
                 </a:solidFill>
@@ -28151,14 +28151,14 @@
               <a:buNone/>
             </a:pPr>
             <a:r>
-              <a:rPr lang="en-US" sz="2200" dirty="0">
+              <a:rPr lang="en-US" sz="1700" dirty="0">
                 <a:solidFill>
                   <a:srgbClr val="222222"/>
                 </a:solidFill>
               </a:rPr>
               <a:t> 대상마다 언어와 활동이 달라야 한다</a:t>
             </a:r>
-            <a:endParaRPr lang="en-US" sz="2200" dirty="0"/>
+            <a:endParaRPr lang="en-US" sz="1700" dirty="0"/>
           </a:p>
         </p:txBody>
       </p:sp>
@@ -28248,7 +28248,7 @@
               <a:buNone/>
             </a:pPr>
             <a:r>
-              <a:rPr lang="en-US" sz="1800" b="1" dirty="0">
+              <a:rPr lang="en-US" sz="1700" b="1" dirty="0">
                 <a:solidFill>
                   <a:srgbClr val="1F4E4A"/>
                 </a:solidFill>
@@ -28259,14 +28259,14 @@
               <a:buNone/>
             </a:pPr>
             <a:r>
-              <a:rPr lang="en-US" sz="1800" dirty="0">
+              <a:rPr lang="en-US" sz="1700" dirty="0">
                 <a:solidFill>
                   <a:srgbClr val="222222"/>
                 </a:solidFill>
               </a:rPr>
               <a:t> 충격적 사진·영상·통계로 행동을 강요하지 않는다</a:t>
             </a:r>
-            <a:endParaRPr lang="en-US" sz="1800" dirty="0"/>
+            <a:endParaRPr lang="en-US" sz="1700" dirty="0"/>
           </a:p>
         </p:txBody>
       </p:sp>
@@ -28356,7 +28356,7 @@
               <a:buNone/>
             </a:pPr>
             <a:r>
-              <a:rPr lang="en-US" sz="1900" b="1" dirty="0">
+              <a:rPr lang="en-US" sz="1700" b="1" dirty="0">
                 <a:solidFill>
                   <a:srgbClr val="1F4E4A"/>
                 </a:solidFill>
@@ -28367,14 +28367,14 @@
               <a:buNone/>
             </a:pPr>
             <a:r>
-              <a:rPr lang="en-US" sz="1900" dirty="0">
+              <a:rPr lang="en-US" sz="1700" dirty="0">
                 <a:solidFill>
                   <a:srgbClr val="222222"/>
                 </a:solidFill>
               </a:rPr>
               <a:t> 사별 경험 공개나 감정 표현을 강요하지 않는다</a:t>
             </a:r>
-            <a:endParaRPr lang="en-US" sz="1900" dirty="0"/>
+            <a:endParaRPr lang="en-US" sz="1700" dirty="0"/>
           </a:p>
         </p:txBody>
       </p:sp>
@@ -28464,7 +28464,7 @@
               <a:buNone/>
             </a:pPr>
             <a:r>
-              <a:rPr lang="en-US" sz="1800" b="1" dirty="0">
+              <a:rPr lang="en-US" sz="1700" b="1" dirty="0">
                 <a:solidFill>
                   <a:srgbClr val="1F4E4A"/>
                 </a:solidFill>
@@ -28475,14 +28475,14 @@
               <a:buNone/>
             </a:pPr>
             <a:r>
-              <a:rPr lang="en-US" sz="1800" dirty="0">
+              <a:rPr lang="en-US" sz="1700" dirty="0">
                 <a:solidFill>
                   <a:srgbClr val="222222"/>
                 </a:solidFill>
               </a:rPr>
               <a:t> 특정 죽음관·장례방식을 정답으로 제시하지 않는다</a:t>
             </a:r>
-            <a:endParaRPr lang="en-US" sz="1800" dirty="0"/>
+            <a:endParaRPr lang="en-US" sz="1700" dirty="0"/>
           </a:p>
         </p:txBody>
       </p:sp>
@@ -28572,7 +28572,7 @@
               <a:buNone/>
             </a:pPr>
             <a:r>
-              <a:rPr lang="en-US" sz="1900" b="1" dirty="0">
+              <a:rPr lang="en-US" sz="1700" b="1" dirty="0">
                 <a:solidFill>
                   <a:srgbClr val="1F4E4A"/>
                 </a:solidFill>
@@ -28583,14 +28583,14 @@
               <a:buNone/>
             </a:pPr>
             <a:r>
-              <a:rPr lang="en-US" sz="1900" dirty="0">
+              <a:rPr lang="en-US" sz="1700" dirty="0">
                 <a:solidFill>
                   <a:srgbClr val="222222"/>
                 </a:solidFill>
               </a:rPr>
               <a:t> 자살위험·트라우마·복합애도 시 연결할 기관 확보</a:t>
             </a:r>
-            <a:endParaRPr lang="en-US" sz="1900" dirty="0"/>
+            <a:endParaRPr lang="en-US" sz="1700" dirty="0"/>
           </a:p>
         </p:txBody>
       </p:sp>
@@ -28680,7 +28680,7 @@
               <a:buNone/>
             </a:pPr>
             <a:r>
-              <a:rPr lang="en-US" sz="2000" b="1" dirty="0">
+              <a:rPr lang="en-US" sz="1700" b="1" dirty="0">
                 <a:solidFill>
                   <a:srgbClr val="1F4E4A"/>
                 </a:solidFill>
@@ -28691,14 +28691,14 @@
               <a:buNone/>
             </a:pPr>
             <a:r>
-              <a:rPr lang="en-US" sz="2000" dirty="0">
+              <a:rPr lang="en-US" sz="1700" dirty="0">
                 <a:solidFill>
                   <a:srgbClr val="222222"/>
                 </a:solidFill>
               </a:rPr>
               <a:t> 마지막 활동은 “오늘 무엇을 다르게 살 것인가”</a:t>
             </a:r>
-            <a:endParaRPr lang="en-US" sz="2000" dirty="0"/>
+            <a:endParaRPr lang="en-US" sz="1700" dirty="0"/>
           </a:p>
         </p:txBody>
       </p:sp>
@@ -47673,7 +47673,7 @@
               <a:buNone/>
             </a:pPr>
             <a:r>
-              <a:rPr lang="en-US" sz="2100" b="1" dirty="0">
+              <a:rPr lang="en-US" sz="2000" b="1" dirty="0">
                 <a:solidFill>
                   <a:srgbClr val="1F4E4A"/>
                 </a:solidFill>
@@ -47684,14 +47684,14 @@
               <a:buNone/>
             </a:pPr>
             <a:r>
-              <a:rPr lang="en-US" sz="2100" dirty="0">
+              <a:rPr lang="en-US" sz="2000" dirty="0">
                 <a:solidFill>
                   <a:srgbClr val="222222"/>
                 </a:solidFill>
               </a:rPr>
               <a:t> 핵심은 관계·돌봄·도움요청의 연결망이다.</a:t>
             </a:r>
-            <a:endParaRPr lang="en-US" sz="2100" dirty="0"/>
+            <a:endParaRPr lang="en-US" sz="2000" dirty="0"/>
           </a:p>
         </p:txBody>
       </p:sp>
@@ -51691,7 +51691,7 @@
               <a:buNone/>
             </a:pPr>
             <a:r>
-              <a:rPr lang="en-US" sz="2200" b="1" dirty="0">
+              <a:rPr lang="en-US" sz="2100" b="1" dirty="0">
                 <a:solidFill>
                   <a:srgbClr val="1F4E4A"/>
                 </a:solidFill>
@@ -51702,14 +51702,14 @@
               <a:buNone/>
             </a:pPr>
             <a:r>
-              <a:rPr lang="en-US" sz="2200" dirty="0">
+              <a:rPr lang="en-US" sz="2100" dirty="0">
                 <a:solidFill>
                   <a:srgbClr val="222222"/>
                 </a:solidFill>
               </a:rPr>
               <a:t>대상별 죽음 이해와 교육 접근의 차이를 구분한다</a:t>
             </a:r>
-            <a:endParaRPr lang="en-US" sz="2200" dirty="0"/>
+            <a:endParaRPr lang="en-US" sz="2100" dirty="0"/>
           </a:p>
         </p:txBody>
       </p:sp>
@@ -51907,7 +51907,7 @@
               <a:buNone/>
             </a:pPr>
             <a:r>
-              <a:rPr lang="en-US" sz="2200" b="1" dirty="0">
+              <a:rPr lang="en-US" sz="2100" b="1" dirty="0">
                 <a:solidFill>
                   <a:srgbClr val="1F4E4A"/>
                 </a:solidFill>
@@ -51918,14 +51918,14 @@
               <a:buNone/>
             </a:pPr>
             <a:r>
-              <a:rPr lang="en-US" sz="2200" dirty="0">
+              <a:rPr lang="en-US" sz="2100" dirty="0">
                 <a:solidFill>
                   <a:srgbClr val="222222"/>
                 </a:solidFill>
               </a:rPr>
               <a:t>재난·사별 이후 애도교육의 기본원칙을 이해한다</a:t>
             </a:r>
-            <a:endParaRPr lang="en-US" sz="2200" dirty="0"/>
+            <a:endParaRPr lang="en-US" sz="2100" dirty="0"/>
           </a:p>
         </p:txBody>
       </p:sp>
@@ -52015,7 +52015,7 @@
               <a:buNone/>
             </a:pPr>
             <a:r>
-              <a:rPr lang="en-US" sz="2200" b="1" dirty="0">
+              <a:rPr lang="en-US" sz="2100" b="1" dirty="0">
                 <a:solidFill>
                   <a:srgbClr val="1F4E4A"/>
                 </a:solidFill>
@@ -52026,14 +52026,14 @@
               <a:buNone/>
             </a:pPr>
             <a:r>
-              <a:rPr lang="en-US" sz="2200" dirty="0">
+              <a:rPr lang="en-US" sz="2100" dirty="0">
                 <a:solidFill>
                   <a:srgbClr val="222222"/>
                 </a:solidFill>
               </a:rPr>
               <a:t>고립을 관계망·돌봄·지역사회의 문제로 설명한다</a:t>
             </a:r>
-            <a:endParaRPr lang="en-US" sz="2200" dirty="0"/>
+            <a:endParaRPr lang="en-US" sz="2100" dirty="0"/>
           </a:p>
         </p:txBody>
       </p:sp>
@@ -52123,7 +52123,7 @@
               <a:buNone/>
             </a:pPr>
             <a:r>
-              <a:rPr lang="en-US" sz="2200" b="1" dirty="0">
+              <a:rPr lang="en-US" sz="2100" b="1" dirty="0">
                 <a:solidFill>
                   <a:srgbClr val="1F4E4A"/>
                 </a:solidFill>
@@ -52134,14 +52134,14 @@
               <a:buNone/>
             </a:pPr>
             <a:r>
-              <a:rPr lang="en-US" sz="2200" dirty="0">
+              <a:rPr lang="en-US" sz="2100" dirty="0">
                 <a:solidFill>
                   <a:srgbClr val="222222"/>
                 </a:solidFill>
               </a:rPr>
               <a:t>기관·지역에서 할 수 있는 프로그램과 한계를 제안한다</a:t>
             </a:r>
-            <a:endParaRPr lang="en-US" sz="2200" dirty="0"/>
+            <a:endParaRPr lang="en-US" sz="2100" dirty="0"/>
           </a:p>
         </p:txBody>
       </p:sp>
@@ -52231,7 +52231,7 @@
               <a:buNone/>
             </a:pPr>
             <a:r>
-              <a:rPr lang="en-US" sz="2200" b="1" dirty="0">
+              <a:rPr lang="en-US" sz="2100" b="1" dirty="0">
                 <a:solidFill>
                   <a:srgbClr val="1F4E4A"/>
                 </a:solidFill>
@@ -52242,14 +52242,14 @@
               <a:buNone/>
             </a:pPr>
             <a:r>
-              <a:rPr lang="en-US" sz="2200" dirty="0">
+              <a:rPr lang="en-US" sz="2100" dirty="0">
                 <a:solidFill>
                   <a:srgbClr val="222222"/>
                 </a:solidFill>
               </a:rPr>
               <a:t>엔딩–웰다잉–웰빙 순환과 연결해 교육을 설계한다</a:t>
             </a:r>
-            <a:endParaRPr lang="en-US" sz="2200" dirty="0"/>
+            <a:endParaRPr lang="en-US" sz="2100" dirty="0"/>
           </a:p>
         </p:txBody>
       </p:sp>

--- a/ppt/out/WLC2급_제02강_초고령사회와죽음교육의필요성.pptx
+++ b/ppt/out/WLC2급_제02강_초고령사회와죽음교육의필요성.pptx
@@ -161,7 +161,7 @@
   <p:extLst>
     <p:ext uri="{521415D9-36F7-43E2-AB2F-B90AF26B5E84}">
       <p14:sectionLst xmlns:p14="http://schemas.microsoft.com/office/powerpoint/2010/main">
-        <p14:section name="열기" id="{62e9e096-7b92-7099-59b6-4af42b694c00}">
+        <p14:section name="열기" id="{2d9f67fa-6659-0549-84ed-80e5ecb67d91}">
           <p14:sldIdLst>
             <p14:sldId id="256"/>
             <p14:sldId id="257"/>
@@ -174,7 +174,7 @@
             <p14:sldId id="264"/>
           </p14:sldIdLst>
         </p14:section>
-        <p14:section name="1교시 죽음교육이 필요한 사회" id="{c19ef6b8-2d10-5ddc-4913-01416fe7098d}">
+        <p14:section name="1교시 죽음교육이 필요한 사회" id="{e2e00d32-19d3-e88a-ec76-b3ec08ce33be}">
           <p14:sldIdLst>
             <p14:sldId id="265"/>
             <p14:sldId id="266"/>
@@ -189,7 +189,7 @@
             <p14:sldId id="275"/>
           </p14:sldIdLst>
         </p14:section>
-        <p14:section name="2교시 대상과 현장" id="{0e974a05-5719-d190-f576-708bd79ddddb}">
+        <p14:section name="2교시 대상과 현장" id="{677dabf7-4faa-a66e-79bf-479b96361e42}">
           <p14:sldIdLst>
             <p14:sldId id="276"/>
             <p14:sldId id="277"/>
@@ -207,7 +207,7 @@
             <p14:sldId id="289"/>
           </p14:sldIdLst>
         </p14:section>
-        <p14:section name="3교시 죽음교육을 설계하다" id="{bfebe4a3-9b4c-c3e4-4b63-9395d63ba24b}">
+        <p14:section name="3교시 죽음교육을 설계하다" id="{68ec10cb-64c1-48a6-e45c-ee895fecc976}">
           <p14:sldIdLst>
             <p14:sldId id="290"/>
             <p14:sldId id="291"/>
@@ -226,7 +226,7 @@
             <p14:sldId id="304"/>
           </p14:sldIdLst>
         </p14:section>
-        <p14:section name="정리와 예고" id="{b58f3c7c-476c-cab7-0a1c-d95a66ca6404}">
+        <p14:section name="정리와 예고" id="{f39d836b-5625-22af-3b6f-045470b130b1}">
           <p14:sldIdLst>
             <p14:sldId id="305"/>
             <p14:sldId id="306"/>
@@ -7257,7 +7257,7 @@
         <p:spPr>
           <a:xfrm>
             <a:off x="548640" y="2560320"/>
-            <a:ext cx="9144000" cy="1097280"/>
+            <a:ext cx="10607040" cy="1097280"/>
           </a:xfrm>
           <a:prstGeom prst="rect">
             <a:avLst/>
@@ -53584,47 +53584,47 @@
 </file>
 
 <file path=ppt/theme/theme1.xml><?xml version="1.0" encoding="utf-8"?>
-<a:theme xmlns:a="http://schemas.openxmlformats.org/drawingml/2006/main" name="WLC Teal">
+<a:theme xmlns:a="http://schemas.openxmlformats.org/drawingml/2006/main" name="Office Theme">
   <a:themeElements>
-    <a:clrScheme name="WLC Teal">
+    <a:clrScheme name="Office">
       <a:dk1>
-        <a:srgbClr val="222222"/>
+        <a:sysClr val="windowText" lastClr="000000"/>
       </a:dk1>
       <a:lt1>
-        <a:srgbClr val="FFFFFF"/>
+        <a:sysClr val="window" lastClr="FFFFFF"/>
       </a:lt1>
       <a:dk2>
-        <a:srgbClr val="1F4E4A"/>
+        <a:srgbClr val="44546A"/>
       </a:dk2>
       <a:lt2>
-        <a:srgbClr val="EAF3F0"/>
+        <a:srgbClr val="E7E6E6"/>
       </a:lt2>
       <a:accent1>
-        <a:srgbClr val="2E7D6B"/>
+        <a:srgbClr val="4472C4"/>
       </a:accent1>
       <a:accent2>
-        <a:srgbClr val="D98E04"/>
+        <a:srgbClr val="ED7D31"/>
       </a:accent2>
       <a:accent3>
-        <a:srgbClr val="3A6EA5"/>
+        <a:srgbClr val="A5A5A5"/>
       </a:accent3>
       <a:accent4>
-        <a:srgbClr val="B5452F"/>
+        <a:srgbClr val="FFC000"/>
       </a:accent4>
       <a:accent5>
-        <a:srgbClr val="8FB9A8"/>
+        <a:srgbClr val="5B9BD5"/>
       </a:accent5>
       <a:accent6>
-        <a:srgbClr val="6B6B6B"/>
+        <a:srgbClr val="70AD47"/>
       </a:accent6>
       <a:hlink>
-        <a:srgbClr val="3A6EA5"/>
+        <a:srgbClr val="0563C1"/>
       </a:hlink>
       <a:folHlink>
-        <a:srgbClr val="1F4E4A"/>
+        <a:srgbClr val="954F72"/>
       </a:folHlink>
     </a:clrScheme>
-    <a:fontScheme name="WLC Teal">
+    <a:fontScheme name="Office">
       <a:majorFont>
         <a:latin typeface="Noto Serif KR Black"/>
         <a:ea typeface=""/>

--- a/ppt/out/WLC2급_제02강_초고령사회와죽음교육의필요성.pptx
+++ b/ppt/out/WLC2급_제02강_초고령사회와죽음교육의필요성.pptx
@@ -161,7 +161,7 @@
   <p:extLst>
     <p:ext uri="{521415D9-36F7-43E2-AB2F-B90AF26B5E84}">
       <p14:sectionLst xmlns:p14="http://schemas.microsoft.com/office/powerpoint/2010/main">
-        <p14:section name="열기" id="{2d9f67fa-6659-0549-84ed-80e5ecb67d91}">
+        <p14:section name="열기" id="{8ac94d29-56a4-7003-889b-912c91be1ff8}">
           <p14:sldIdLst>
             <p14:sldId id="256"/>
             <p14:sldId id="257"/>
@@ -174,7 +174,7 @@
             <p14:sldId id="264"/>
           </p14:sldIdLst>
         </p14:section>
-        <p14:section name="1교시 죽음교육이 필요한 사회" id="{e2e00d32-19d3-e88a-ec76-b3ec08ce33be}">
+        <p14:section name="1교시 죽음교육이 필요한 사회" id="{9fe4c0d5-f8c0-59a6-2040-fdc102765c12}">
           <p14:sldIdLst>
             <p14:sldId id="265"/>
             <p14:sldId id="266"/>
@@ -189,7 +189,7 @@
             <p14:sldId id="275"/>
           </p14:sldIdLst>
         </p14:section>
-        <p14:section name="2교시 대상과 현장" id="{677dabf7-4faa-a66e-79bf-479b96361e42}">
+        <p14:section name="2교시 대상과 현장" id="{dde43651-2239-d119-5ae7-0ea3cdfb2b11}">
           <p14:sldIdLst>
             <p14:sldId id="276"/>
             <p14:sldId id="277"/>
@@ -207,7 +207,7 @@
             <p14:sldId id="289"/>
           </p14:sldIdLst>
         </p14:section>
-        <p14:section name="3교시 죽음교육을 설계하다" id="{68ec10cb-64c1-48a6-e45c-ee895fecc976}">
+        <p14:section name="3교시 죽음교육을 설계하다" id="{c13f56c7-7bb7-5000-7e6b-7194fd29b5a7}">
           <p14:sldIdLst>
             <p14:sldId id="290"/>
             <p14:sldId id="291"/>
@@ -226,7 +226,7 @@
             <p14:sldId id="304"/>
           </p14:sldIdLst>
         </p14:section>
-        <p14:section name="정리와 예고" id="{f39d836b-5625-22af-3b6f-045470b130b1}">
+        <p14:section name="정리와 예고" id="{2b6780c2-ba0b-92e2-8323-6a4deeb1ad50}">
           <p14:sldIdLst>
             <p14:sldId id="305"/>
             <p14:sldId id="306"/>
@@ -53584,47 +53584,47 @@
 </file>
 
 <file path=ppt/theme/theme1.xml><?xml version="1.0" encoding="utf-8"?>
-<a:theme xmlns:a="http://schemas.openxmlformats.org/drawingml/2006/main" name="Office Theme">
+<a:theme xmlns:a="http://schemas.openxmlformats.org/drawingml/2006/main" name="WLC Teal">
   <a:themeElements>
-    <a:clrScheme name="Office">
+    <a:clrScheme name="WLC Teal">
       <a:dk1>
-        <a:sysClr val="windowText" lastClr="000000"/>
+        <a:srgbClr val="222222"/>
       </a:dk1>
       <a:lt1>
-        <a:sysClr val="window" lastClr="FFFFFF"/>
+        <a:srgbClr val="FFFFFF"/>
       </a:lt1>
       <a:dk2>
-        <a:srgbClr val="44546A"/>
+        <a:srgbClr val="1F4E4A"/>
       </a:dk2>
       <a:lt2>
-        <a:srgbClr val="E7E6E6"/>
+        <a:srgbClr val="EAF3F0"/>
       </a:lt2>
       <a:accent1>
-        <a:srgbClr val="4472C4"/>
+        <a:srgbClr val="2E7D6B"/>
       </a:accent1>
       <a:accent2>
-        <a:srgbClr val="ED7D31"/>
+        <a:srgbClr val="D98E04"/>
       </a:accent2>
       <a:accent3>
-        <a:srgbClr val="A5A5A5"/>
+        <a:srgbClr val="3A6EA5"/>
       </a:accent3>
       <a:accent4>
-        <a:srgbClr val="FFC000"/>
+        <a:srgbClr val="B5452F"/>
       </a:accent4>
       <a:accent5>
-        <a:srgbClr val="5B9BD5"/>
+        <a:srgbClr val="8FB9A8"/>
       </a:accent5>
       <a:accent6>
-        <a:srgbClr val="70AD47"/>
+        <a:srgbClr val="6B6B6B"/>
       </a:accent6>
       <a:hlink>
-        <a:srgbClr val="0563C1"/>
+        <a:srgbClr val="3A6EA5"/>
       </a:hlink>
       <a:folHlink>
-        <a:srgbClr val="954F72"/>
+        <a:srgbClr val="1F4E4A"/>
       </a:folHlink>
     </a:clrScheme>
-    <a:fontScheme name="Office">
+    <a:fontScheme name="WLC Teal">
       <a:majorFont>
         <a:latin typeface="Noto Serif KR Black"/>
         <a:ea typeface=""/>
